--- a/classes/parte-0-fundamentos-y-prerrequisitos/019-expresiones-regulares-para-analisis-de-logs-y-datos/clase-019-presentacion.pptx
+++ b/classes/parte-0-fundamentos-y-prerrequisitos/019-expresiones-regulares-para-analisis-de-logs-y-datos/clase-019-presentacion.pptx
@@ -17,6 +17,9 @@
     <p:sldId id="265" r:id="rId16"/>
     <p:sldId id="266" r:id="rId17"/>
     <p:sldId id="267" r:id="rId18"/>
+    <p:sldId id="268" r:id="rId19"/>
+    <p:sldId id="269" r:id="rId20"/>
+    <p:sldId id="270" r:id="rId21"/>
   </p:sldIdLst>
   <p:sldSz cx="9144000" cy="6858000" type="screen4x3"/>
   <p:notesSz cx="6858000" cy="9144000"/>
@@ -3198,7 +3201,7 @@
                   <a:srgbClr val="0B3D2E"/>
                 </a:solidFill>
               </a:rPr>
-              <a:t>⚠️ Errores comunes</a:t>
+              <a:t>✍️ Ejercicios</a:t>
             </a:r>
           </a:p>
         </p:txBody>
@@ -3236,67 +3239,82 @@
                   <a:srgbClr val="22282E"/>
                 </a:solidFill>
               </a:rPr>
-              <a:t>•  El patrón captura de más — Cuantificador codicioso. Usa versión perezosa ? o clases más específicas.</a:t>
-            </a:r>
-          </a:p>
-          <a:p>
-            <a:pPr>
-              <a:spcAft>
-                <a:spcPts val="600"/>
-              </a:spcAft>
-            </a:pPr>
-            <a:r>
-              <a:rPr sz="1500">
-                <a:solidFill>
-                  <a:srgbClr val="22282E"/>
-                </a:solidFill>
-              </a:rPr>
-              <a:t>•  . no coincide con lo esperado — . no incluye salto de línea por defecto. Usa flag DOTALL si lo necesitas.</a:t>
-            </a:r>
-          </a:p>
-          <a:p>
-            <a:pPr>
-              <a:spcAft>
-                <a:spcPts val="600"/>
-              </a:spcAft>
-            </a:pPr>
-            <a:r>
-              <a:rPr sz="1500">
-                <a:solidFill>
-                  <a:srgbClr val="22282E"/>
-                </a:solidFill>
-              </a:rPr>
-              <a:t>•  Falsos positivos en IPs (999.999.999.999) — El patrón no valida rangos 0-255. Refínalo o valida después con código.</a:t>
-            </a:r>
-          </a:p>
-          <a:p>
-            <a:pPr>
-              <a:spcAft>
-                <a:spcPts val="600"/>
-              </a:spcAft>
-            </a:pPr>
-            <a:r>
-              <a:rPr sz="1500">
-                <a:solidFill>
-                  <a:srgbClr val="22282E"/>
-                </a:solidFill>
-              </a:rPr>
-              <a:t>•  grep no entiende \d — grep básico no es PCRE. Usa grep -P o -E con clases POSIX.</a:t>
-            </a:r>
-          </a:p>
-          <a:p>
-            <a:pPr>
-              <a:spcAft>
-                <a:spcPts val="600"/>
-              </a:spcAft>
-            </a:pPr>
-            <a:r>
-              <a:rPr sz="1500">
-                <a:solidFill>
-                  <a:srgbClr val="22282E"/>
-                </a:solidFill>
-              </a:rPr>
-              <a:t>•  La regex cuelga el proceso — ReDoS por retroceso. Simplifica y evita (a+)+ sobre entradas largas.</a:t>
+              <a:t>•  Escribe una regex que extraiga solo IPs privadas (rangos 10/8, 172.16/12 y 192.168/16) de un log.</a:t>
+            </a:r>
+          </a:p>
+          <a:p>
+            <a:pPr>
+              <a:spcAft>
+                <a:spcPts val="600"/>
+              </a:spcAft>
+            </a:pPr>
+            <a:r>
+              <a:rPr sz="1500">
+                <a:solidFill>
+                  <a:srgbClr val="22282E"/>
+                </a:solidFill>
+              </a:rPr>
+              <a:t>•  Captura usuario e IP de cada línea de "Failed password" y cuenta los intentos por IP.</a:t>
+            </a:r>
+          </a:p>
+          <a:p>
+            <a:pPr>
+              <a:spcAft>
+                <a:spcPts val="600"/>
+              </a:spcAft>
+            </a:pPr>
+            <a:r>
+              <a:rPr sz="1500">
+                <a:solidFill>
+                  <a:srgbClr val="22282E"/>
+                </a:solidFill>
+              </a:rPr>
+              <a:t>•  Crea un patrón que valide un correo de forma razonable (sin perseguir la perfección del RFC) y explica sus límites.</a:t>
+            </a:r>
+          </a:p>
+          <a:p>
+            <a:pPr>
+              <a:spcAft>
+                <a:spcPts val="600"/>
+              </a:spcAft>
+            </a:pPr>
+            <a:r>
+              <a:rPr sz="1500">
+                <a:solidFill>
+                  <a:srgbClr val="22282E"/>
+                </a:solidFill>
+              </a:rPr>
+              <a:t>•  Extrae todas las URLs de una página guardada y quédate solo con el dominio usando un grupo de captura.</a:t>
+            </a:r>
+          </a:p>
+          <a:p>
+            <a:pPr>
+              <a:spcAft>
+                <a:spcPts val="600"/>
+              </a:spcAft>
+            </a:pPr>
+            <a:r>
+              <a:rPr sz="1500">
+                <a:solidFill>
+                  <a:srgbClr val="22282E"/>
+                </a:solidFill>
+              </a:rPr>
+              <a:t>•  Diferencia en una sola pasada MD5, SHA-1 y SHA-256 por su longitud, usando alternancia o grupos con nombre.</a:t>
+            </a:r>
+          </a:p>
+          <a:p>
+            <a:pPr>
+              <a:spcAft>
+                <a:spcPts val="600"/>
+              </a:spcAft>
+            </a:pPr>
+            <a:r>
+              <a:rPr sz="1500">
+                <a:solidFill>
+                  <a:srgbClr val="22282E"/>
+                </a:solidFill>
+              </a:rPr>
+              <a:t>•  Investiga un ejemplo real de ReDoS (por ejemplo un patrón (a+)+), reprodúcelo en regex101 midiendo los pasos, y reescríbelo para hacerlo seguro.</a:t>
             </a:r>
           </a:p>
         </p:txBody>
@@ -3347,7 +3365,7 @@
                   <a:srgbClr val="0B3D2E"/>
                 </a:solidFill>
               </a:rPr>
-              <a:t>❓ Preguntas frecuentes</a:t>
+              <a:t>📝 Reto verificable</a:t>
             </a:r>
           </a:p>
         </p:txBody>
@@ -3385,52 +3403,22 @@
                   <a:srgbClr val="22282E"/>
                 </a:solidFill>
               </a:rPr>
-              <a:t>•  ❓ ¿Debo validar IPs solo con regex? La regex acota candidatos, pero validar rangos 0-255 exactos con regex es engorroso. Es mejor extraer con regex y validar con código (ipaddress en Python).</a:t>
-            </a:r>
-          </a:p>
-          <a:p>
-            <a:pPr>
-              <a:spcAft>
-                <a:spcPts val="600"/>
-              </a:spcAft>
-            </a:pPr>
-            <a:r>
-              <a:rPr sz="1500">
-                <a:solidFill>
-                  <a:srgbClr val="22282E"/>
-                </a:solidFill>
-              </a:rPr>
-              <a:t>•  ❓ ¿Por qué mi regex funciona en regex101 pero no en grep? Los motores difieren. grep básico usa BRE/ERE; PCRE (regex101/Python) admite \d, lookarounds, etc. Ajusta al motor real.</a:t>
-            </a:r>
-          </a:p>
-          <a:p>
-            <a:pPr>
-              <a:spcAft>
-                <a:spcPts val="600"/>
-              </a:spcAft>
-            </a:pPr>
-            <a:r>
-              <a:rPr sz="1500">
-                <a:solidFill>
-                  <a:srgbClr val="22282E"/>
-                </a:solidFill>
-              </a:rPr>
-              <a:t>•  ❓ ¿Qué es un lookahead/lookbehind? Aserciones que comprueban contexto sin consumirlo ((?=...), (?&lt;=...)). Útiles para extraer algo "seguido de" o "precedido por" sin incluirlo.</a:t>
-            </a:r>
-          </a:p>
-          <a:p>
-            <a:pPr>
-              <a:spcAft>
-                <a:spcPts val="600"/>
-              </a:spcAft>
-            </a:pPr>
-            <a:r>
-              <a:rPr sz="1500">
-                <a:solidFill>
-                  <a:srgbClr val="22282E"/>
-                </a:solidFill>
-              </a:rPr>
-              <a:t>•  ❓ ¿Regex sirve para parsear HTML/JSON? Para extracciones puntuales sí, pero para estructuras anidadas usa parsers dedicados. La regex no maneja bien anidamiento arbitrario.</a:t>
+              <a:t>•  Escribe iocextract.py, una herramienta que reciba un fichero de texto y extraiga y clasifique IOCs: IPv4, dominios, URLs, correos y hashes (MD5/SHA-1/SHA-256), imprimiendo un recuento por categoría y…</a:t>
+            </a:r>
+          </a:p>
+          <a:p>
+            <a:pPr>
+              <a:spcAft>
+                <a:spcPts val="600"/>
+              </a:spcAft>
+            </a:pPr>
+            <a:r>
+              <a:rPr sz="1500">
+                <a:solidFill>
+                  <a:srgbClr val="22282E"/>
+                </a:solidFill>
+              </a:rPr>
+              <a:t>•  Criterio de aceptación: sobre una muestra con IOCs conocidos, la herramienta los extrae todos sin falsos positivos evidentes, clasifica correctamente los tres tipos de hash por su longitud, y…</a:t>
             </a:r>
           </a:p>
         </p:txBody>
@@ -3481,7 +3469,7 @@
                   <a:srgbClr val="0B3D2E"/>
                 </a:solidFill>
               </a:rPr>
-              <a:t>🔗 Referencias</a:t>
+              <a:t>⚠️ Errores comunes</a:t>
             </a:r>
           </a:p>
         </p:txBody>
@@ -3519,6 +3507,304 @@
                   <a:srgbClr val="22282E"/>
                 </a:solidFill>
               </a:rPr>
+              <a:t>•  El patrón captura de más — Cuantificador codicioso. Usa la versión perezosa ? o, mejor, una clase negada como [^&gt;].</a:t>
+            </a:r>
+          </a:p>
+          <a:p>
+            <a:pPr>
+              <a:spcAft>
+                <a:spcPts val="600"/>
+              </a:spcAft>
+            </a:pPr>
+            <a:r>
+              <a:rPr sz="1500">
+                <a:solidFill>
+                  <a:srgbClr val="22282E"/>
+                </a:solidFill>
+              </a:rPr>
+              <a:t>•  . no coincide con lo esperado — . no incluye el salto de línea por defecto. Usa el flag DOTALL si necesitas abarcar varias líneas.</a:t>
+            </a:r>
+          </a:p>
+          <a:p>
+            <a:pPr>
+              <a:spcAft>
+                <a:spcPts val="600"/>
+              </a:spcAft>
+            </a:pPr>
+            <a:r>
+              <a:rPr sz="1500">
+                <a:solidFill>
+                  <a:srgbClr val="22282E"/>
+                </a:solidFill>
+              </a:rPr>
+              <a:t>•  Falsos positivos en IPs (999.999.999.999) — El patrón no valida el rango 0-255. Extrae con regex y valida después con ipaddress.</a:t>
+            </a:r>
+          </a:p>
+          <a:p>
+            <a:pPr>
+              <a:spcAft>
+                <a:spcPts val="600"/>
+              </a:spcAft>
+            </a:pPr>
+            <a:r>
+              <a:rPr sz="1500">
+                <a:solidFill>
+                  <a:srgbClr val="22282E"/>
+                </a:solidFill>
+              </a:rPr>
+              <a:t>•  grep no entiende \d — grep básico no es PCRE. Usa grep -P, o -E con clases POSIX ([[:digit:]]).</a:t>
+            </a:r>
+          </a:p>
+          <a:p>
+            <a:pPr>
+              <a:spcAft>
+                <a:spcPts val="600"/>
+              </a:spcAft>
+            </a:pPr>
+            <a:r>
+              <a:rPr sz="1500">
+                <a:solidFill>
+                  <a:srgbClr val="22282E"/>
+                </a:solidFill>
+              </a:rPr>
+              <a:t>•  La regex cuelga el proceso — ReDoS por retroceso. Elimina cuantificadores anidados ((a+)+) y ancla bien el patrón.</a:t>
+            </a:r>
+          </a:p>
+          <a:p>
+            <a:pPr>
+              <a:spcAft>
+                <a:spcPts val="600"/>
+              </a:spcAft>
+            </a:pPr>
+            <a:r>
+              <a:rPr sz="1500">
+                <a:solidFill>
+                  <a:srgbClr val="22282E"/>
+                </a:solidFill>
+              </a:rPr>
+              <a:t>•  El grupo devuelve None — El grupo opcional no casó. Comprueba que existió coincidencia antes de leer el grupo.</a:t>
+            </a:r>
+          </a:p>
+        </p:txBody>
+      </p:sp>
+    </p:spTree>
+  </p:cSld>
+  <p:clrMapOvr>
+    <a:masterClrMapping/>
+  </p:clrMapOvr>
+</p:sld>
+</file>
+
+<file path=ppt/slides/slide13.xml><?xml version="1.0" encoding="utf-8"?>
+<p:sld xmlns:a="http://schemas.openxmlformats.org/drawingml/2006/main" xmlns:p="http://schemas.openxmlformats.org/presentationml/2006/main" xmlns:r="http://schemas.openxmlformats.org/officeDocument/2006/relationships">
+  <p:cSld>
+    <p:spTree>
+      <p:nvGrpSpPr>
+        <p:cNvPr id="1" name=""/>
+        <p:cNvGrpSpPr/>
+        <p:nvPr/>
+      </p:nvGrpSpPr>
+      <p:grpSpPr/>
+      <p:sp>
+        <p:nvSpPr>
+          <p:cNvPr id="2" name="TextBox 1"/>
+          <p:cNvSpPr txBox="1"/>
+          <p:nvPr/>
+        </p:nvSpPr>
+        <p:spPr>
+          <a:xfrm>
+            <a:off x="457200" y="320040"/>
+            <a:ext cx="8229600" cy="822960"/>
+          </a:xfrm>
+          <a:prstGeom prst="rect">
+            <a:avLst/>
+          </a:prstGeom>
+          <a:noFill/>
+        </p:spPr>
+        <p:txBody>
+          <a:bodyPr wrap="square">
+            <a:spAutoFit/>
+          </a:bodyPr>
+          <a:lstStyle/>
+          <a:p>
+            <a:r>
+              <a:rPr sz="2600" b="1">
+                <a:solidFill>
+                  <a:srgbClr val="0B3D2E"/>
+                </a:solidFill>
+              </a:rPr>
+              <a:t>❓ Preguntas frecuentes</a:t>
+            </a:r>
+          </a:p>
+        </p:txBody>
+      </p:sp>
+      <p:sp>
+        <p:nvSpPr>
+          <p:cNvPr id="3" name="TextBox 2"/>
+          <p:cNvSpPr txBox="1"/>
+          <p:nvPr/>
+        </p:nvSpPr>
+        <p:spPr>
+          <a:xfrm>
+            <a:off x="457200" y="1280160"/>
+            <a:ext cx="8229600" cy="4937760"/>
+          </a:xfrm>
+          <a:prstGeom prst="rect">
+            <a:avLst/>
+          </a:prstGeom>
+          <a:noFill/>
+        </p:spPr>
+        <p:txBody>
+          <a:bodyPr wrap="square">
+            <a:spAutoFit/>
+          </a:bodyPr>
+          <a:lstStyle/>
+          <a:p>
+            <a:pPr>
+              <a:spcAft>
+                <a:spcPts val="600"/>
+              </a:spcAft>
+            </a:pPr>
+            <a:r>
+              <a:rPr sz="1500">
+                <a:solidFill>
+                  <a:srgbClr val="22282E"/>
+                </a:solidFill>
+              </a:rPr>
+              <a:t>•  ❓ ¿Debo validar IPs solo con regex? La regex acota candidatos con rapidez, pero validar el rango exacto 0-255 de cada octeto con regex es engorroso y frágil. Es mejor extraer con regex y validar con…</a:t>
+            </a:r>
+          </a:p>
+          <a:p>
+            <a:pPr>
+              <a:spcAft>
+                <a:spcPts val="600"/>
+              </a:spcAft>
+            </a:pPr>
+            <a:r>
+              <a:rPr sz="1500">
+                <a:solidFill>
+                  <a:srgbClr val="22282E"/>
+                </a:solidFill>
+              </a:rPr>
+              <a:t>•  ❓ ¿Por qué mi regex funciona en regex101 pero no en grep? Los motores difieren. grep básico usa BRE/ERE; PCRE (regex101, Python) admite \d, lookarounds y más. Ajusta el patrón al motor real donde vas…</a:t>
+            </a:r>
+          </a:p>
+          <a:p>
+            <a:pPr>
+              <a:spcAft>
+                <a:spcPts val="600"/>
+              </a:spcAft>
+            </a:pPr>
+            <a:r>
+              <a:rPr sz="1500">
+                <a:solidFill>
+                  <a:srgbClr val="22282E"/>
+                </a:solidFill>
+              </a:rPr>
+              <a:t>•  ❓ ¿Qué es un lookahead o lookbehind? Aserciones que comprueban contexto sin consumirlo ((?=...), (?&lt;=...)). Sirven para extraer algo "seguido de" o "precedido por" sin incluir ese contexto en la…</a:t>
+            </a:r>
+          </a:p>
+          <a:p>
+            <a:pPr>
+              <a:spcAft>
+                <a:spcPts val="600"/>
+              </a:spcAft>
+            </a:pPr>
+            <a:r>
+              <a:rPr sz="1500">
+                <a:solidFill>
+                  <a:srgbClr val="22282E"/>
+                </a:solidFill>
+              </a:rPr>
+              <a:t>•  ❓ ¿Sirve regex para parsear HTML o JSON? Para extracciones puntuales sí, pero para estructuras anidadas usa un parser dedicado. Las regex no manejan bien el anidamiento arbitrario y acabas con…</a:t>
+            </a:r>
+          </a:p>
+        </p:txBody>
+      </p:sp>
+    </p:spTree>
+  </p:cSld>
+  <p:clrMapOvr>
+    <a:masterClrMapping/>
+  </p:clrMapOvr>
+</p:sld>
+</file>
+
+<file path=ppt/slides/slide14.xml><?xml version="1.0" encoding="utf-8"?>
+<p:sld xmlns:a="http://schemas.openxmlformats.org/drawingml/2006/main" xmlns:p="http://schemas.openxmlformats.org/presentationml/2006/main" xmlns:r="http://schemas.openxmlformats.org/officeDocument/2006/relationships">
+  <p:cSld>
+    <p:spTree>
+      <p:nvGrpSpPr>
+        <p:cNvPr id="1" name=""/>
+        <p:cNvGrpSpPr/>
+        <p:nvPr/>
+      </p:nvGrpSpPr>
+      <p:grpSpPr/>
+      <p:sp>
+        <p:nvSpPr>
+          <p:cNvPr id="2" name="TextBox 1"/>
+          <p:cNvSpPr txBox="1"/>
+          <p:nvPr/>
+        </p:nvSpPr>
+        <p:spPr>
+          <a:xfrm>
+            <a:off x="457200" y="320040"/>
+            <a:ext cx="8229600" cy="822960"/>
+          </a:xfrm>
+          <a:prstGeom prst="rect">
+            <a:avLst/>
+          </a:prstGeom>
+          <a:noFill/>
+        </p:spPr>
+        <p:txBody>
+          <a:bodyPr wrap="square">
+            <a:spAutoFit/>
+          </a:bodyPr>
+          <a:lstStyle/>
+          <a:p>
+            <a:r>
+              <a:rPr sz="2600" b="1">
+                <a:solidFill>
+                  <a:srgbClr val="0B3D2E"/>
+                </a:solidFill>
+              </a:rPr>
+              <a:t>🔗 Referencias</a:t>
+            </a:r>
+          </a:p>
+        </p:txBody>
+      </p:sp>
+      <p:sp>
+        <p:nvSpPr>
+          <p:cNvPr id="3" name="TextBox 2"/>
+          <p:cNvSpPr txBox="1"/>
+          <p:nvPr/>
+        </p:nvSpPr>
+        <p:spPr>
+          <a:xfrm>
+            <a:off x="457200" y="1280160"/>
+            <a:ext cx="8229600" cy="4937760"/>
+          </a:xfrm>
+          <a:prstGeom prst="rect">
+            <a:avLst/>
+          </a:prstGeom>
+          <a:noFill/>
+        </p:spPr>
+        <p:txBody>
+          <a:bodyPr wrap="square">
+            <a:spAutoFit/>
+          </a:bodyPr>
+          <a:lstStyle/>
+          <a:p>
+            <a:pPr>
+              <a:spcAft>
+                <a:spcPts val="600"/>
+              </a:spcAft>
+            </a:pPr>
+            <a:r>
+              <a:rPr sz="1500">
+                <a:solidFill>
+                  <a:srgbClr val="22282E"/>
+                </a:solidFill>
+              </a:rPr>
               <a:t>•  Jeffrey Friedl, Mastering Regular Expressions (O'Reilly).</a:t>
             </a:r>
           </a:p>
@@ -3534,41 +3820,131 @@
                   <a:srgbClr val="22282E"/>
                 </a:solidFill>
               </a:rPr>
-              <a:t>•  Python re — &lt;https://docs.python.org/3/library/re.html&gt;</a:t>
-            </a:r>
-          </a:p>
-          <a:p>
-            <a:pPr>
-              <a:spcAft>
-                <a:spcPts val="600"/>
-              </a:spcAft>
-            </a:pPr>
-            <a:r>
-              <a:rPr sz="1500">
-                <a:solidFill>
-                  <a:srgbClr val="22282E"/>
-                </a:solidFill>
-              </a:rPr>
-              <a:t>•  regex101 (probador interactivo) — &lt;https://regex101.com/&gt;</a:t>
-            </a:r>
-          </a:p>
-          <a:p>
-            <a:pPr>
-              <a:spcAft>
-                <a:spcPts val="600"/>
-              </a:spcAft>
-            </a:pPr>
-            <a:r>
-              <a:rPr sz="1500">
-                <a:solidFill>
-                  <a:srgbClr val="22282E"/>
-                </a:solidFill>
-              </a:rPr>
-              <a:t>•  OWASP: Regular Expression DoS (ReDoS) — &lt;https://owasp.org/www-community/attacks/RegularexpressionDenialofService-ReDoS&gt;</a:t>
-            </a:r>
-          </a:p>
-        </p:txBody>
-      </p:sp>
+              <a:t>•  Python, documentación de re — &lt;https://docs.python.org/3/library/re.html&gt;</a:t>
+            </a:r>
+          </a:p>
+          <a:p>
+            <a:pPr>
+              <a:spcAft>
+                <a:spcPts val="600"/>
+              </a:spcAft>
+            </a:pPr>
+            <a:r>
+              <a:rPr sz="1500">
+                <a:solidFill>
+                  <a:srgbClr val="22282E"/>
+                </a:solidFill>
+              </a:rPr>
+              <a:t>•  regex101 (probador interactivo con contador de pasos) — &lt;https://regex101.com/&gt;</a:t>
+            </a:r>
+          </a:p>
+          <a:p>
+            <a:pPr>
+              <a:spcAft>
+                <a:spcPts val="600"/>
+              </a:spcAft>
+            </a:pPr>
+            <a:r>
+              <a:rPr sz="1500">
+                <a:solidFill>
+                  <a:srgbClr val="22282E"/>
+                </a:solidFill>
+              </a:rPr>
+              <a:t>•  OWASP, Regular Expression Denial of Service (ReDoS) — &lt;https://owasp.org/www-community/attacks/RegularexpressionDenialofService-ReDoS&gt;</a:t>
+            </a:r>
+          </a:p>
+          <a:p>
+            <a:pPr>
+              <a:spcAft>
+                <a:spcPts val="600"/>
+              </a:spcAft>
+            </a:pPr>
+            <a:r>
+              <a:rPr sz="1500">
+                <a:solidFill>
+                  <a:srgbClr val="22282E"/>
+                </a:solidFill>
+              </a:rPr>
+              <a:t>•  MITRE ATT&amp;CK, Indicator Removal / IOC (contexto de indicadores) — &lt;https://attack.mitre.org/&gt;</a:t>
+            </a:r>
+          </a:p>
+        </p:txBody>
+      </p:sp>
+    </p:spTree>
+  </p:cSld>
+  <p:clrMapOvr>
+    <a:masterClrMapping/>
+  </p:clrMapOvr>
+</p:sld>
+</file>
+
+<file path=ppt/slides/slide15.xml><?xml version="1.0" encoding="utf-8"?>
+<p:sld xmlns:a="http://schemas.openxmlformats.org/drawingml/2006/main" xmlns:p="http://schemas.openxmlformats.org/presentationml/2006/main" xmlns:r="http://schemas.openxmlformats.org/officeDocument/2006/relationships">
+  <p:cSld>
+    <p:spTree>
+      <p:nvGrpSpPr>
+        <p:cNvPr id="1" name=""/>
+        <p:cNvGrpSpPr/>
+        <p:nvPr/>
+      </p:nvGrpSpPr>
+      <p:grpSpPr/>
+      <p:sp>
+        <p:nvSpPr>
+          <p:cNvPr id="2" name="TextBox 1"/>
+          <p:cNvSpPr txBox="1"/>
+          <p:nvPr/>
+        </p:nvSpPr>
+        <p:spPr>
+          <a:xfrm>
+            <a:off x="457200" y="274320"/>
+            <a:ext cx="8229600" cy="640080"/>
+          </a:xfrm>
+          <a:prstGeom prst="rect">
+            <a:avLst/>
+          </a:prstGeom>
+          <a:noFill/>
+        </p:spPr>
+        <p:txBody>
+          <a:bodyPr wrap="square">
+            <a:spAutoFit/>
+          </a:bodyPr>
+          <a:lstStyle/>
+          <a:p>
+            <a:r>
+              <a:rPr sz="2200" b="1">
+                <a:solidFill>
+                  <a:srgbClr val="0B3D2E"/>
+                </a:solidFill>
+              </a:rPr>
+              <a:t>Diagrama de la clase</a:t>
+            </a:r>
+          </a:p>
+        </p:txBody>
+      </p:sp>
+      <p:pic>
+        <p:nvPicPr>
+          <p:cNvPr id="3" name="Picture 2" descr="83b4b8e59352486f.png"/>
+          <p:cNvPicPr>
+            <a:picLocks noChangeAspect="1"/>
+          </p:cNvPicPr>
+          <p:nvPr/>
+        </p:nvPicPr>
+        <p:blipFill>
+          <a:blip r:embed="rId2"/>
+          <a:stretch>
+            <a:fillRect/>
+          </a:stretch>
+        </p:blipFill>
+        <p:spPr>
+          <a:xfrm>
+            <a:off x="2886625" y="1097280"/>
+            <a:ext cx="3370750" cy="5303520"/>
+          </a:xfrm>
+          <a:prstGeom prst="rect">
+            <a:avLst/>
+          </a:prstGeom>
+        </p:spPr>
+      </p:pic>
     </p:spTree>
   </p:cSld>
   <p:clrMapOvr>
@@ -3653,7 +4029,7 @@
                   <a:srgbClr val="22282E"/>
                 </a:solidFill>
               </a:rPr>
-              <a:t>•  Dominar las expresiones regulares para extraer, validar y correlacionar información en logs, capturas y volcados de datos. Las regex son omnipresentes en SIEM, IDS, grep y herramientas de análisis; saber escribirlas bien multiplica tu velocidad como analista.</a:t>
+              <a:t>•  Dominar las expresiones regulares para extraer, validar y correlacionar información en logs, capturas y volcados de datos con precisión y velocidad. Las regex son omnipresentes en SIEM, IDS, reglas…</a:t>
             </a:r>
           </a:p>
         </p:txBody>
@@ -3757,67 +4133,82 @@
                   <a:srgbClr val="22282E"/>
                 </a:solidFill>
               </a:rPr>
-              <a:t>•  Construir patrones con clases, cuantificadores y anclas.</a:t>
-            </a:r>
-          </a:p>
-          <a:p>
-            <a:pPr>
-              <a:spcAft>
-                <a:spcPts val="600"/>
-              </a:spcAft>
-            </a:pPr>
-            <a:r>
-              <a:rPr sz="1500">
-                <a:solidFill>
-                  <a:srgbClr val="22282E"/>
-                </a:solidFill>
-              </a:rPr>
-              <a:t>•  Capturar subcadenas con grupos y referencias.</a:t>
-            </a:r>
-          </a:p>
-          <a:p>
-            <a:pPr>
-              <a:spcAft>
-                <a:spcPts val="600"/>
-              </a:spcAft>
-            </a:pPr>
-            <a:r>
-              <a:rPr sz="1500">
-                <a:solidFill>
-                  <a:srgbClr val="22282E"/>
-                </a:solidFill>
-              </a:rPr>
-              <a:t>•  Extraer IOCs (IPs, hashes, URLs, correos) de texto.</a:t>
-            </a:r>
-          </a:p>
-          <a:p>
-            <a:pPr>
-              <a:spcAft>
-                <a:spcPts val="600"/>
-              </a:spcAft>
-            </a:pPr>
-            <a:r>
-              <a:rPr sz="1500">
-                <a:solidFill>
-                  <a:srgbClr val="22282E"/>
-                </a:solidFill>
-              </a:rPr>
-              <a:t>•  Aplicar regex en grep -P, Python (re) y herramientas de análisis.</a:t>
-            </a:r>
-          </a:p>
-          <a:p>
-            <a:pPr>
-              <a:spcAft>
-                <a:spcPts val="600"/>
-              </a:spcAft>
-            </a:pPr>
-            <a:r>
-              <a:rPr sz="1500">
-                <a:solidFill>
-                  <a:srgbClr val="22282E"/>
-                </a:solidFill>
-              </a:rPr>
-              <a:t>•  Evitar patrones peligrosos (ReDoS) y errores frecuentes.</a:t>
+              <a:t>•  Construir patrones con clases de caracteres, cuantificadores y anclas.</a:t>
+            </a:r>
+          </a:p>
+          <a:p>
+            <a:pPr>
+              <a:spcAft>
+                <a:spcPts val="600"/>
+              </a:spcAft>
+            </a:pPr>
+            <a:r>
+              <a:rPr sz="1500">
+                <a:solidFill>
+                  <a:srgbClr val="22282E"/>
+                </a:solidFill>
+              </a:rPr>
+              <a:t>•  Capturar subcadenas con grupos, grupos con nombre y referencias.</a:t>
+            </a:r>
+          </a:p>
+          <a:p>
+            <a:pPr>
+              <a:spcAft>
+                <a:spcPts val="600"/>
+              </a:spcAft>
+            </a:pPr>
+            <a:r>
+              <a:rPr sz="1500">
+                <a:solidFill>
+                  <a:srgbClr val="22282E"/>
+                </a:solidFill>
+              </a:rPr>
+              <a:t>•  Extraer IOCs (IPs, hashes, URLs, correos) de texto no estructurado.</a:t>
+            </a:r>
+          </a:p>
+          <a:p>
+            <a:pPr>
+              <a:spcAft>
+                <a:spcPts val="600"/>
+              </a:spcAft>
+            </a:pPr>
+            <a:r>
+              <a:rPr sz="1500">
+                <a:solidFill>
+                  <a:srgbClr val="22282E"/>
+                </a:solidFill>
+              </a:rPr>
+              <a:t>•  Aplicar regex de forma coherente en grep -P, en Python (re) y en herramientas de análisis.</a:t>
+            </a:r>
+          </a:p>
+          <a:p>
+            <a:pPr>
+              <a:spcAft>
+                <a:spcPts val="600"/>
+              </a:spcAft>
+            </a:pPr>
+            <a:r>
+              <a:rPr sz="1500">
+                <a:solidFill>
+                  <a:srgbClr val="22282E"/>
+                </a:solidFill>
+              </a:rPr>
+              <a:t>•  Distinguir codicia de pereza y elegir la variante correcta en cada extracción.</a:t>
+            </a:r>
+          </a:p>
+          <a:p>
+            <a:pPr>
+              <a:spcAft>
+                <a:spcPts val="600"/>
+              </a:spcAft>
+            </a:pPr>
+            <a:r>
+              <a:rPr sz="1500">
+                <a:solidFill>
+                  <a:srgbClr val="22282E"/>
+                </a:solidFill>
+              </a:rPr>
+              <a:t>•  Evitar patrones vulnerables a ReDoS y otros errores frecuentes.</a:t>
             </a:r>
           </a:p>
         </p:txBody>
@@ -4047,7 +4438,7 @@
                   <a:srgbClr val="0B3D2E"/>
                 </a:solidFill>
               </a:rPr>
-              <a:t>📖 Definiciones y características</a:t>
+              <a:t>🧠 Explicación en profundidad</a:t>
             </a:r>
           </a:p>
         </p:txBody>
@@ -4085,82 +4476,97 @@
                   <a:srgbClr val="22282E"/>
                 </a:solidFill>
               </a:rPr>
-              <a:t>•  Metacarácter: símbolo con significado especial (.  + ? [ ] ( ) ^ $ \). Clave: escapar con \ para tratarlo como literal.</a:t>
-            </a:r>
-          </a:p>
-          <a:p>
-            <a:pPr>
-              <a:spcAft>
-                <a:spcPts val="600"/>
-              </a:spcAft>
-            </a:pPr>
-            <a:r>
-              <a:rPr sz="1500">
-                <a:solidFill>
-                  <a:srgbClr val="22282E"/>
-                </a:solidFill>
-              </a:rPr>
-              <a:t>•  Clase de caracteres: conjunto entre corchetes ([a-f0-9]). Clave: \d = dígito, \w = alfanumérico+, \s = espacio.</a:t>
-            </a:r>
-          </a:p>
-          <a:p>
-            <a:pPr>
-              <a:spcAft>
-                <a:spcPts val="600"/>
-              </a:spcAft>
-            </a:pPr>
-            <a:r>
-              <a:rPr sz="1500">
-                <a:solidFill>
-                  <a:srgbClr val="22282E"/>
-                </a:solidFill>
-              </a:rPr>
-              <a:t>•  Cuantificador codicioso: /+ intentan capturar lo máximo. Clave: .? (perezoso) captura lo mínimo; crucial para no "tragar" de más.</a:t>
-            </a:r>
-          </a:p>
-          <a:p>
-            <a:pPr>
-              <a:spcAft>
-                <a:spcPts val="600"/>
-              </a:spcAft>
-            </a:pPr>
-            <a:r>
-              <a:rPr sz="1500">
-                <a:solidFill>
-                  <a:srgbClr val="22282E"/>
-                </a:solidFill>
-              </a:rPr>
-              <a:t>•  Grupo de captura: (...) guarda lo coincidido para reutilizarlo. Clave: (?:...) agrupa sin capturar.</a:t>
-            </a:r>
-          </a:p>
-          <a:p>
-            <a:pPr>
-              <a:spcAft>
-                <a:spcPts val="600"/>
-              </a:spcAft>
-            </a:pPr>
-            <a:r>
-              <a:rPr sz="1500">
-                <a:solidFill>
-                  <a:srgbClr val="22282E"/>
-                </a:solidFill>
-              </a:rPr>
-              <a:t>•  Ancla: ^ (inicio), $ (fin), \b (límite de palabra). Clave: evita coincidencias parciales no deseadas.</a:t>
-            </a:r>
-          </a:p>
-          <a:p>
-            <a:pPr>
-              <a:spcAft>
-                <a:spcPts val="600"/>
-              </a:spcAft>
-            </a:pPr>
-            <a:r>
-              <a:rPr sz="1500">
-                <a:solidFill>
-                  <a:srgbClr val="22282E"/>
-                </a:solidFill>
-              </a:rPr>
-              <a:t>•  ReDoS: denegación de servicio por regex con retroceso catastrófico. Clave: cuantificadores anidados sobre patrones ambiguos son peligrosos.</a:t>
+              <a:t>•  Una expresión regular es una notación compacta para describir un conjunto de cadenas, que el motor traduce internamente a una máquina de estados que recorre el texto carácter a carácter intentando…</a:t>
+            </a:r>
+          </a:p>
+          <a:p>
+            <a:pPr>
+              <a:spcAft>
+                <a:spcPts val="600"/>
+              </a:spcAft>
+            </a:pPr>
+            <a:r>
+              <a:rPr sz="1500">
+                <a:solidFill>
+                  <a:srgbClr val="22282E"/>
+                </a:solidFill>
+              </a:rPr>
+              <a:t>•  Casi todo patrón útil combina tres tipos de piezas. Las clases de caracteres dicen qué puede aparecer: [a-f0-9] es un dígito hexadecimal, y hay atajos como \d (dígito), \w (alfanumérico más guion…</a:t>
+            </a:r>
+          </a:p>
+          <a:p>
+            <a:pPr>
+              <a:spcAft>
+                <a:spcPts val="600"/>
+              </a:spcAft>
+            </a:pPr>
+            <a:r>
+              <a:rPr sz="1500">
+                <a:solidFill>
+                  <a:srgbClr val="22282E"/>
+                </a:solidFill>
+              </a:rPr>
+              <a:t>•  Patrón completo: \b\d{2}:\d{2}:\d{2}\b — una hora HH:MM:SS dentro de una línea</a:t>
+            </a:r>
+          </a:p>
+          <a:p>
+            <a:pPr>
+              <a:spcAft>
+                <a:spcPts val="600"/>
+              </a:spcAft>
+            </a:pPr>
+            <a:r>
+              <a:rPr sz="1500">
+                <a:solidFill>
+                  <a:srgbClr val="22282E"/>
+                </a:solidFill>
+              </a:rPr>
+              <a:t>•  de log.</a:t>
+            </a:r>
+          </a:p>
+          <a:p>
+            <a:pPr>
+              <a:spcAft>
+                <a:spcPts val="600"/>
+              </a:spcAft>
+            </a:pPr>
+            <a:r>
+              <a:rPr sz="1500">
+                <a:solidFill>
+                  <a:srgbClr val="22282E"/>
+                </a:solidFill>
+              </a:rPr>
+              <a:t>•  Fragmento — Qué es</a:t>
+            </a:r>
+          </a:p>
+          <a:p>
+            <a:pPr>
+              <a:spcAft>
+                <a:spcPts val="600"/>
+              </a:spcAft>
+            </a:pPr>
+            <a:r>
+              <a:rPr sz="1500">
+                <a:solidFill>
+                  <a:srgbClr val="22282E"/>
+                </a:solidFill>
+              </a:rPr>
+              <a:t>•  \b — límite de palabra (ancla de ancho cero)</a:t>
+            </a:r>
+          </a:p>
+          <a:p>
+            <a:pPr>
+              <a:spcAft>
+                <a:spcPts val="600"/>
+              </a:spcAft>
+            </a:pPr>
+            <a:r>
+              <a:rPr sz="1500">
+                <a:solidFill>
+                  <a:srgbClr val="22282E"/>
+                </a:solidFill>
+              </a:rPr>
+              <a:t>•  \d{2} — clase de dígito con cuantificador exacto</a:t>
             </a:r>
           </a:p>
         </p:txBody>
@@ -4211,7 +4617,7 @@
                   <a:srgbClr val="0B3D2E"/>
                 </a:solidFill>
               </a:rPr>
-              <a:t>🧰 Herramientas y preparación</a:t>
+              <a:t>📖 Definiciones y características</a:t>
             </a:r>
           </a:p>
         </p:txBody>
@@ -4249,7 +4655,97 @@
                   <a:srgbClr val="22282E"/>
                 </a:solidFill>
               </a:rPr>
-              <a:t>•  Practica con grep -P (PCRE), Python re, y un entorno visual como regex101.com (elige el motor PCRE/Python) para ver el árbol de coincidencias. Ten a mano un log real (auth.log, access.log) y una muestra de texto con IOCs para extraer.</a:t>
+              <a:t>•  Metacarácter: símbolo con significado especial en una regex (.  + ? [ ] ( ) ^ $ \ |). Para tratarlo como texto literal hay que escaparlo con \, algo imprescindible al casar puntos en IPs o dominios.</a:t>
+            </a:r>
+          </a:p>
+          <a:p>
+            <a:pPr>
+              <a:spcAft>
+                <a:spcPts val="600"/>
+              </a:spcAft>
+            </a:pPr>
+            <a:r>
+              <a:rPr sz="1500">
+                <a:solidFill>
+                  <a:srgbClr val="22282E"/>
+                </a:solidFill>
+              </a:rPr>
+              <a:t>•  Clase de caracteres: conjunto de caracteres permitidos entre corchetes ([a-f0-9]). Atajos frecuentes: \d (dígito), \w (alfanumérico más ), \s (espacio). Una clase negada [^...] casa cualquier cosa…</a:t>
+            </a:r>
+          </a:p>
+          <a:p>
+            <a:pPr>
+              <a:spcAft>
+                <a:spcPts val="600"/>
+              </a:spcAft>
+            </a:pPr>
+            <a:r>
+              <a:rPr sz="1500">
+                <a:solidFill>
+                  <a:srgbClr val="22282E"/>
+                </a:solidFill>
+              </a:rPr>
+              <a:t>•  Cuantificador: indica cuántas repeticiones ( cero o más, + una o más, ? cero o una, {n,m} un rango). Por defecto son codiciosos.</a:t>
+            </a:r>
+          </a:p>
+          <a:p>
+            <a:pPr>
+              <a:spcAft>
+                <a:spcPts val="600"/>
+              </a:spcAft>
+            </a:pPr>
+            <a:r>
+              <a:rPr sz="1500">
+                <a:solidFill>
+                  <a:srgbClr val="22282E"/>
+                </a:solidFill>
+              </a:rPr>
+              <a:t>•  Codicioso frente a perezoso: un cuantificador codicioso (.) toma lo máximo y retrocede; el perezoso (.?) toma lo mínimo. Elegir mal "traga" texto de más; a menudo una clase negada es aún mejor opción.</a:t>
+            </a:r>
+          </a:p>
+          <a:p>
+            <a:pPr>
+              <a:spcAft>
+                <a:spcPts val="600"/>
+              </a:spcAft>
+            </a:pPr>
+            <a:r>
+              <a:rPr sz="1500">
+                <a:solidFill>
+                  <a:srgbClr val="22282E"/>
+                </a:solidFill>
+              </a:rPr>
+              <a:t>•  Grupo de captura: paréntesis (...) que guardan lo coincidido para reutilizarlo; (?:...) agrupa sin capturar y (?P&lt;nombre&gt;...) captura con nombre en Python, lo que hace el extractor legible.</a:t>
+            </a:r>
+          </a:p>
+          <a:p>
+            <a:pPr>
+              <a:spcAft>
+                <a:spcPts val="600"/>
+              </a:spcAft>
+            </a:pPr>
+            <a:r>
+              <a:rPr sz="1500">
+                <a:solidFill>
+                  <a:srgbClr val="22282E"/>
+                </a:solidFill>
+              </a:rPr>
+              <a:t>•  Ancla: posición sin consumir caracteres: ^ (inicio), $ (fin), \b (límite de palabra). Evitan coincidencias parciales no deseadas.</a:t>
+            </a:r>
+          </a:p>
+          <a:p>
+            <a:pPr>
+              <a:spcAft>
+                <a:spcPts val="600"/>
+              </a:spcAft>
+            </a:pPr>
+            <a:r>
+              <a:rPr sz="1500">
+                <a:solidFill>
+                  <a:srgbClr val="22282E"/>
+                </a:solidFill>
+              </a:rPr>
+              <a:t>•  Lookaround: aserción que comprueba contexto sin consumirlo ((?=...) lookahead, (?&lt;=...) lookbehind). Útil para extraer algo "seguido de" o "precedido por" sin incluir el contexto.</a:t>
             </a:r>
           </a:p>
         </p:txBody>
@@ -4300,7 +4796,7 @@
                   <a:srgbClr val="0B3D2E"/>
                 </a:solidFill>
               </a:rPr>
-              <a:t>🧪 Laboratorio guiado</a:t>
+              <a:t>📔 Glosario</a:t>
             </a:r>
           </a:p>
         </p:txBody>
@@ -4338,97 +4834,97 @@
                   <a:srgbClr val="22282E"/>
                 </a:solidFill>
               </a:rPr>
-              <a:t>•  Clases y cuantificadores. Encuentra todas las horas HH:MM:SS en un log:</a:t>
-            </a:r>
-          </a:p>
-          <a:p>
-            <a:pPr>
-              <a:spcAft>
-                <a:spcPts val="600"/>
-              </a:spcAft>
-            </a:pPr>
-            <a:r>
-              <a:rPr sz="1500">
-                <a:solidFill>
-                  <a:srgbClr val="22282E"/>
-                </a:solidFill>
-              </a:rPr>
-              <a:t>•  grep -oP '\b\d{2}:\d{2}:\d{2}\b' auth.log | head</a:t>
-            </a:r>
-          </a:p>
-          <a:p>
-            <a:pPr>
-              <a:spcAft>
-                <a:spcPts val="600"/>
-              </a:spcAft>
-            </a:pPr>
-            <a:r>
-              <a:rPr sz="1500">
-                <a:solidFill>
-                  <a:srgbClr val="22282E"/>
-                </a:solidFill>
-              </a:rPr>
-              <a:t>•  Extraer IPv4. Patrón razonable para direcciones:</a:t>
-            </a:r>
-          </a:p>
-          <a:p>
-            <a:pPr>
-              <a:spcAft>
-                <a:spcPts val="600"/>
-              </a:spcAft>
-            </a:pPr>
-            <a:r>
-              <a:rPr sz="1500">
-                <a:solidFill>
-                  <a:srgbClr val="22282E"/>
-                </a:solidFill>
-              </a:rPr>
-              <a:t>•  grep -oP '\b(?:\d{1,3}\.){3}\d{1,3}\b' access.log | sort | uniq -c | sort -nr</a:t>
-            </a:r>
-          </a:p>
-          <a:p>
-            <a:pPr>
-              <a:spcAft>
-                <a:spcPts val="600"/>
-              </a:spcAft>
-            </a:pPr>
-            <a:r>
-              <a:rPr sz="1500">
-                <a:solidFill>
-                  <a:srgbClr val="22282E"/>
-                </a:solidFill>
-              </a:rPr>
-              <a:t>•  Grupos de captura en Python:</a:t>
-            </a:r>
-          </a:p>
-          <a:p>
-            <a:pPr>
-              <a:spcAft>
-                <a:spcPts val="600"/>
-              </a:spcAft>
-            </a:pPr>
-            <a:r>
-              <a:rPr sz="1500">
-                <a:solidFill>
-                  <a:srgbClr val="22282E"/>
-                </a:solidFill>
-              </a:rPr>
-              <a:t>•  import re</a:t>
-            </a:r>
-          </a:p>
-          <a:p>
-            <a:pPr>
-              <a:spcAft>
-                <a:spcPts val="600"/>
-              </a:spcAft>
-            </a:pPr>
-            <a:r>
-              <a:rPr sz="1500">
-                <a:solidFill>
-                  <a:srgbClr val="22282E"/>
-                </a:solidFill>
-              </a:rPr>
-              <a:t>•  m = re.search(r'Failed password for (\w+) from ([\d.]+)', linea)</a:t>
+              <a:t>•  Término — Definición concisa</a:t>
+            </a:r>
+          </a:p>
+          <a:p>
+            <a:pPr>
+              <a:spcAft>
+                <a:spcPts val="600"/>
+              </a:spcAft>
+            </a:pPr>
+            <a:r>
+              <a:rPr sz="1500">
+                <a:solidFill>
+                  <a:srgbClr val="22282E"/>
+                </a:solidFill>
+              </a:rPr>
+              <a:t>•  Regex — Notación que describe un conjunto de cadenas</a:t>
+            </a:r>
+          </a:p>
+          <a:p>
+            <a:pPr>
+              <a:spcAft>
+                <a:spcPts val="600"/>
+              </a:spcAft>
+            </a:pPr>
+            <a:r>
+              <a:rPr sz="1500">
+                <a:solidFill>
+                  <a:srgbClr val="22282E"/>
+                </a:solidFill>
+              </a:rPr>
+              <a:t>•  Literal — Carácter que casa consigo mismo</a:t>
+            </a:r>
+          </a:p>
+          <a:p>
+            <a:pPr>
+              <a:spcAft>
+                <a:spcPts val="600"/>
+              </a:spcAft>
+            </a:pPr>
+            <a:r>
+              <a:rPr sz="1500">
+                <a:solidFill>
+                  <a:srgbClr val="22282E"/>
+                </a:solidFill>
+              </a:rPr>
+              <a:t>•  Metacarácter — Símbolo con significado especial en regex</a:t>
+            </a:r>
+          </a:p>
+          <a:p>
+            <a:pPr>
+              <a:spcAft>
+                <a:spcPts val="600"/>
+              </a:spcAft>
+            </a:pPr>
+            <a:r>
+              <a:rPr sz="1500">
+                <a:solidFill>
+                  <a:srgbClr val="22282E"/>
+                </a:solidFill>
+              </a:rPr>
+              <a:t>•  \d \w \s — Atajos: dígito, alfanumérico, espacio</a:t>
+            </a:r>
+          </a:p>
+          <a:p>
+            <a:pPr>
+              <a:spcAft>
+                <a:spcPts val="600"/>
+              </a:spcAft>
+            </a:pPr>
+            <a:r>
+              <a:rPr sz="1500">
+                <a:solidFill>
+                  <a:srgbClr val="22282E"/>
+                </a:solidFill>
+              </a:rPr>
+              <a:t>•  Clase negada — [^...]: casa todo salvo lo listado</a:t>
+            </a:r>
+          </a:p>
+          <a:p>
+            <a:pPr>
+              <a:spcAft>
+                <a:spcPts val="600"/>
+              </a:spcAft>
+            </a:pPr>
+            <a:r>
+              <a:rPr sz="1500">
+                <a:solidFill>
+                  <a:srgbClr val="22282E"/>
+                </a:solidFill>
+              </a:rPr>
+              <a:t>•  Cuantificador — Nº de repeticiones (, +, ?, {n,m})</a:t>
             </a:r>
           </a:p>
         </p:txBody>
@@ -4479,7 +4975,7 @@
                   <a:srgbClr val="0B3D2E"/>
                 </a:solidFill>
               </a:rPr>
-              <a:t>✍️ Ejercicios</a:t>
+              <a:t>🧰 Herramientas y preparación</a:t>
             </a:r>
           </a:p>
         </p:txBody>
@@ -4517,82 +5013,7 @@
                   <a:srgbClr val="22282E"/>
                 </a:solidFill>
               </a:rPr>
-              <a:t>•  Escribe una regex que extraiga solo IPs privadas (10/8, 172.16/12, 192.168/16) de un log.</a:t>
-            </a:r>
-          </a:p>
-          <a:p>
-            <a:pPr>
-              <a:spcAft>
-                <a:spcPts val="600"/>
-              </a:spcAft>
-            </a:pPr>
-            <a:r>
-              <a:rPr sz="1500">
-                <a:solidFill>
-                  <a:srgbClr val="22282E"/>
-                </a:solidFill>
-              </a:rPr>
-              <a:t>•  Captura usuario e IP de cada línea de "Failed password" y cuenta intentos por IP.</a:t>
-            </a:r>
-          </a:p>
-          <a:p>
-            <a:pPr>
-              <a:spcAft>
-                <a:spcPts val="600"/>
-              </a:spcAft>
-            </a:pPr>
-            <a:r>
-              <a:rPr sz="1500">
-                <a:solidFill>
-                  <a:srgbClr val="22282E"/>
-                </a:solidFill>
-              </a:rPr>
-              <a:t>•  Crea un patrón que valide un email de forma razonable (sin buscar perfección RFC).</a:t>
-            </a:r>
-          </a:p>
-          <a:p>
-            <a:pPr>
-              <a:spcAft>
-                <a:spcPts val="600"/>
-              </a:spcAft>
-            </a:pPr>
-            <a:r>
-              <a:rPr sz="1500">
-                <a:solidFill>
-                  <a:srgbClr val="22282E"/>
-                </a:solidFill>
-              </a:rPr>
-              <a:t>•  Extrae todas las URLs de una página guardada y quédate solo con el dominio.</a:t>
-            </a:r>
-          </a:p>
-          <a:p>
-            <a:pPr>
-              <a:spcAft>
-                <a:spcPts val="600"/>
-              </a:spcAft>
-            </a:pPr>
-            <a:r>
-              <a:rPr sz="1500">
-                <a:solidFill>
-                  <a:srgbClr val="22282E"/>
-                </a:solidFill>
-              </a:rPr>
-              <a:t>•  Diferencia con una sola pasada MD5, SHA-1 y SHA-256 por su longitud.</a:t>
-            </a:r>
-          </a:p>
-          <a:p>
-            <a:pPr>
-              <a:spcAft>
-                <a:spcPts val="600"/>
-              </a:spcAft>
-            </a:pPr>
-            <a:r>
-              <a:rPr sz="1500">
-                <a:solidFill>
-                  <a:srgbClr val="22282E"/>
-                </a:solidFill>
-              </a:rPr>
-              <a:t>•  Investiga un ejemplo de ReDoS y reescríbelo para hacerlo seguro.</a:t>
+              <a:t>•  Practica con grep -P (que activa el motor PCRE y entiende \d, \b, lookarounds), con el módulo re de Python, y con un entorno visual como regex101.com eligiendo el motor PCRE o Python para ver el…</a:t>
             </a:r>
           </a:p>
         </p:txBody>
@@ -4643,7 +5064,7 @@
                   <a:srgbClr val="0B3D2E"/>
                 </a:solidFill>
               </a:rPr>
-              <a:t>📝 Reto verificable</a:t>
+              <a:t>🧪 Laboratorio guiado</a:t>
             </a:r>
           </a:p>
         </p:txBody>
@@ -4681,22 +5102,97 @@
                   <a:srgbClr val="22282E"/>
                 </a:solidFill>
               </a:rPr>
-              <a:t>•  Escribe iocextract.py, una herramienta que reciba un archivo de texto y extraiga y clasifique IOCs: IPv4, dominios, URLs, correos y hashes (MD5/SHA-1/SHA-256), imprimiendo un recuento por categoría y la lista deduplicada. Usa grupos con nombre y evita patrones vulnerables a ReDoS.</a:t>
-            </a:r>
-          </a:p>
-          <a:p>
-            <a:pPr>
-              <a:spcAft>
-                <a:spcPts val="600"/>
-              </a:spcAft>
-            </a:pPr>
-            <a:r>
-              <a:rPr sz="1500">
-                <a:solidFill>
-                  <a:srgbClr val="22282E"/>
-                </a:solidFill>
-              </a:rPr>
-              <a:t>•  Criterio de aceptación: sobre una muestra con IOCs conocidos, la herramienta los extrae todos sin falsos positivos evidentes, clasifica correctamente los tres tipos de hash por longitud, y deduplica. El código no contiene cuantificadores anidados peligrosos. Verificable contando manualmente los IOCs de la muestra.</a:t>
+              <a:t>•  Clases y cuantificadores. Encuentra todas las horas HH:MM:SS en un log:</a:t>
+            </a:r>
+          </a:p>
+          <a:p>
+            <a:pPr>
+              <a:spcAft>
+                <a:spcPts val="600"/>
+              </a:spcAft>
+            </a:pPr>
+            <a:r>
+              <a:rPr sz="1500">
+                <a:solidFill>
+                  <a:srgbClr val="22282E"/>
+                </a:solidFill>
+              </a:rPr>
+              <a:t>•  Extraer IPv4 y contar las más frecuentes:</a:t>
+            </a:r>
+          </a:p>
+          <a:p>
+            <a:pPr>
+              <a:spcAft>
+                <a:spcPts val="600"/>
+              </a:spcAft>
+            </a:pPr>
+            <a:r>
+              <a:rPr sz="1500">
+                <a:solidFill>
+                  <a:srgbClr val="22282E"/>
+                </a:solidFill>
+              </a:rPr>
+              <a:t>•  Grupos de captura en Python:</a:t>
+            </a:r>
+          </a:p>
+          <a:p>
+            <a:pPr>
+              <a:spcAft>
+                <a:spcPts val="600"/>
+              </a:spcAft>
+            </a:pPr>
+            <a:r>
+              <a:rPr sz="1500">
+                <a:solidFill>
+                  <a:srgbClr val="22282E"/>
+                </a:solidFill>
+              </a:rPr>
+              <a:t>•  Extraer hashes por longitud. Distingue MD5 (32), SHA-1 (40) y SHA-256 (64):</a:t>
+            </a:r>
+          </a:p>
+          <a:p>
+            <a:pPr>
+              <a:spcAft>
+                <a:spcPts val="600"/>
+              </a:spcAft>
+            </a:pPr>
+            <a:r>
+              <a:rPr sz="1500">
+                <a:solidFill>
+                  <a:srgbClr val="22282E"/>
+                </a:solidFill>
+              </a:rPr>
+              <a:t>•  Correos y URLs. Escribe patrones razonables para extraer direcciones de correo y URLs http(s), aceptando que no serán perfectas según el RFC.</a:t>
+            </a:r>
+          </a:p>
+          <a:p>
+            <a:pPr>
+              <a:spcAft>
+                <a:spcPts val="600"/>
+              </a:spcAft>
+            </a:pPr>
+            <a:r>
+              <a:rPr sz="1500">
+                <a:solidFill>
+                  <a:srgbClr val="22282E"/>
+                </a:solidFill>
+              </a:rPr>
+              <a:t>•  Codicia frente a pereza. Compara &lt;.&gt; y &lt;.?&gt; sobre &lt;a&gt;&lt;b&gt; y observa la diferencia; prueba también [^&gt;] como alternativa.</a:t>
+            </a:r>
+          </a:p>
+          <a:p>
+            <a:pPr>
+              <a:spcAft>
+                <a:spcPts val="600"/>
+              </a:spcAft>
+            </a:pPr>
+            <a:r>
+              <a:rPr sz="1500">
+                <a:solidFill>
+                  <a:srgbClr val="22282E"/>
+                </a:solidFill>
+              </a:rPr>
+              <a:t>•  Validar en regex101: pega tus patrones, revisa el desglose y mide los pasos de retroceso para detectar riesgo de ReDoS.</a:t>
             </a:r>
           </a:p>
         </p:txBody>
